--- a/class/cloud_infra_mgmt/11주차_Jenkins_CICD기초/01_강의자료/2차시_DockerCompose로Jenkins설치.pptx
+++ b/class/cloud_infra_mgmt/11주차_Jenkins_CICD기초/01_강의자료/2차시_DockerCompose로Jenkins설치.pptx
@@ -10002,7 +10002,7 @@
               </a:lnSpc>
             </a:pPr>
             <a:r>
-              <a:rPr sz="1500" b="1">
+              <a:rPr sz="1700" b="1">
                 <a:solidFill>
                   <a:srgbClr val="0D9488"/>
                 </a:solidFill>
@@ -10011,7 +10011,7 @@
               <a:t>●  </a:t>
             </a:r>
             <a:r>
-              <a:rPr sz="1500" b="0">
+              <a:rPr sz="1700" b="0">
                 <a:solidFill>
                   <a:srgbClr val="222733"/>
                 </a:solidFill>
@@ -10027,7 +10027,7 @@
               </a:lnSpc>
             </a:pPr>
             <a:r>
-              <a:rPr sz="1500" b="1">
+              <a:rPr sz="1700" b="1">
                 <a:solidFill>
                   <a:srgbClr val="0D9488"/>
                 </a:solidFill>
@@ -10036,7 +10036,7 @@
               <a:t>●  </a:t>
             </a:r>
             <a:r>
-              <a:rPr sz="1500" b="0">
+              <a:rPr sz="1700" b="0">
                 <a:solidFill>
                   <a:srgbClr val="222733"/>
                 </a:solidFill>
@@ -10052,7 +10052,7 @@
               </a:lnSpc>
             </a:pPr>
             <a:r>
-              <a:rPr sz="1500" b="1">
+              <a:rPr sz="1700" b="1">
                 <a:solidFill>
                   <a:srgbClr val="0D9488"/>
                 </a:solidFill>
@@ -10061,7 +10061,7 @@
               <a:t>●  </a:t>
             </a:r>
             <a:r>
-              <a:rPr sz="1500" b="0">
+              <a:rPr sz="1700" b="0">
                 <a:solidFill>
                   <a:srgbClr val="222733"/>
                 </a:solidFill>

--- a/class/cloud_infra_mgmt/11주차_Jenkins_CICD기초/01_강의자료/2차시_DockerCompose로Jenkins설치.pptx
+++ b/class/cloud_infra_mgmt/11주차_Jenkins_CICD기초/01_강의자료/2차시_DockerCompose로Jenkins설치.pptx
@@ -5265,7 +5265,7 @@
           <a:p>
             <a:pPr>
               <a:lnSpc>
-                <a:spcPct val="115000"/>
+                <a:spcPct val="149500"/>
               </a:lnSpc>
             </a:pPr>
             <a:r>
@@ -5290,7 +5290,7 @@
           <a:p>
             <a:pPr>
               <a:lnSpc>
-                <a:spcPct val="115000"/>
+                <a:spcPct val="149500"/>
               </a:lnSpc>
             </a:pPr>
             <a:r>
@@ -5315,7 +5315,7 @@
           <a:p>
             <a:pPr>
               <a:lnSpc>
-                <a:spcPct val="115000"/>
+                <a:spcPct val="149500"/>
               </a:lnSpc>
             </a:pPr>
             <a:r>
@@ -5706,7 +5706,7 @@
           <a:p>
             <a:pPr>
               <a:lnSpc>
-                <a:spcPct val="115000"/>
+                <a:spcPct val="149500"/>
               </a:lnSpc>
             </a:pPr>
             <a:r>
@@ -5731,7 +5731,7 @@
           <a:p>
             <a:pPr>
               <a:lnSpc>
-                <a:spcPct val="115000"/>
+                <a:spcPct val="149500"/>
               </a:lnSpc>
             </a:pPr>
             <a:r>
@@ -5756,7 +5756,7 @@
           <a:p>
             <a:pPr>
               <a:lnSpc>
-                <a:spcPct val="115000"/>
+                <a:spcPct val="149500"/>
               </a:lnSpc>
             </a:pPr>
             <a:r>
@@ -5781,13 +5781,13 @@
           <a:p>
             <a:pPr>
               <a:lnSpc>
-                <a:spcPct val="115000"/>
+                <a:spcPct val="149500"/>
               </a:lnSpc>
             </a:pPr>
             <a:r>
               <a:rPr sz="1700" b="1">
                 <a:solidFill>
-                  <a:srgbClr val="0D9488"/>
+                  <a:srgbClr val="DC2626"/>
                 </a:solidFill>
                 <a:latin typeface="맑은 고딕"/>
               </a:rPr>
@@ -5800,7 +5800,7 @@
                 </a:solidFill>
                 <a:latin typeface="맑은 고딕"/>
               </a:rPr>
-              <a:t>⚠ 플러그인 설치·계정 생성은 다음 3차시에 이어서 진행합니다</a:t>
+              <a:t>플러그인 설치·계정 생성은 다음 3차시에 이어서 진행합니다</a:t>
             </a:r>
           </a:p>
         </p:txBody>
@@ -7030,16 +7030,104 @@
       </p:sp>
       <p:sp>
         <p:nvSpPr>
-          <p:cNvPr id="7" name="Isosceles Triangle 6"/>
+          <p:cNvPr id="7" name="Rectangle 6"/>
           <p:cNvSpPr/>
           <p:nvPr/>
         </p:nvSpPr>
         <p:spPr>
-          <a:xfrm rot="5400000">
-            <a:off x="3495751" y="1673352"/>
-            <a:ext cx="146304" cy="146304"/>
-          </a:xfrm>
-          <a:prstGeom prst="triangle">
+          <a:xfrm>
+            <a:off x="5096865" y="1730959"/>
+            <a:ext cx="1995220" cy="31089"/>
+          </a:xfrm>
+          <a:prstGeom prst="rect">
+            <a:avLst/>
+          </a:prstGeom>
+          <a:solidFill>
+            <a:srgbClr val="14B8A6"/>
+          </a:solidFill>
+          <a:ln>
+            <a:noFill/>
+          </a:ln>
+          <a:effectLst/>
+        </p:spPr>
+        <p:style>
+          <a:lnRef idx="1">
+            <a:schemeClr val="accent1"/>
+          </a:lnRef>
+          <a:fillRef idx="3">
+            <a:schemeClr val="accent1"/>
+          </a:fillRef>
+          <a:effectRef idx="2">
+            <a:schemeClr val="accent1"/>
+          </a:effectRef>
+          <a:fontRef idx="minor">
+            <a:schemeClr val="lt1"/>
+          </a:fontRef>
+        </p:style>
+        <p:txBody>
+          <a:bodyPr rtlCol="0" anchor="ctr"/>
+          <a:lstStyle/>
+          <a:p>
+            <a:pPr algn="ctr"/>
+          </a:p>
+        </p:txBody>
+      </p:sp>
+      <p:sp>
+        <p:nvSpPr>
+          <p:cNvPr id="8" name="Rectangle 7"/>
+          <p:cNvSpPr/>
+          <p:nvPr/>
+        </p:nvSpPr>
+        <p:spPr>
+          <a:xfrm>
+            <a:off x="7622438" y="1730959"/>
+            <a:ext cx="1995220" cy="31089"/>
+          </a:xfrm>
+          <a:prstGeom prst="rect">
+            <a:avLst/>
+          </a:prstGeom>
+          <a:solidFill>
+            <a:srgbClr val="14B8A6"/>
+          </a:solidFill>
+          <a:ln>
+            <a:noFill/>
+          </a:ln>
+          <a:effectLst/>
+        </p:spPr>
+        <p:style>
+          <a:lnRef idx="1">
+            <a:schemeClr val="accent1"/>
+          </a:lnRef>
+          <a:fillRef idx="3">
+            <a:schemeClr val="accent1"/>
+          </a:fillRef>
+          <a:effectRef idx="2">
+            <a:schemeClr val="accent1"/>
+          </a:effectRef>
+          <a:fontRef idx="minor">
+            <a:schemeClr val="lt1"/>
+          </a:fontRef>
+        </p:style>
+        <p:txBody>
+          <a:bodyPr rtlCol="0" anchor="ctr"/>
+          <a:lstStyle/>
+          <a:p>
+            <a:pPr algn="ctr"/>
+          </a:p>
+        </p:txBody>
+      </p:sp>
+      <p:sp>
+        <p:nvSpPr>
+          <p:cNvPr id="9" name="Oval 8"/>
+          <p:cNvSpPr/>
+          <p:nvPr/>
+        </p:nvSpPr>
+        <p:spPr>
+          <a:xfrm>
+            <a:off x="2040940" y="1481328"/>
+            <a:ext cx="530352" cy="530352"/>
+          </a:xfrm>
+          <a:prstGeom prst="ellipse">
             <a:avLst/>
           </a:prstGeom>
           <a:solidFill>
@@ -7074,227 +7162,7 @@
       </p:sp>
       <p:sp>
         <p:nvSpPr>
-          <p:cNvPr id="8" name="Rectangle 7"/>
-          <p:cNvSpPr/>
-          <p:nvPr/>
-        </p:nvSpPr>
-        <p:spPr>
-          <a:xfrm>
-            <a:off x="5096865" y="1730959"/>
-            <a:ext cx="1995220" cy="31089"/>
-          </a:xfrm>
-          <a:prstGeom prst="rect">
-            <a:avLst/>
-          </a:prstGeom>
-          <a:solidFill>
-            <a:srgbClr val="14B8A6"/>
-          </a:solidFill>
-          <a:ln>
-            <a:noFill/>
-          </a:ln>
-          <a:effectLst/>
-        </p:spPr>
-        <p:style>
-          <a:lnRef idx="1">
-            <a:schemeClr val="accent1"/>
-          </a:lnRef>
-          <a:fillRef idx="3">
-            <a:schemeClr val="accent1"/>
-          </a:fillRef>
-          <a:effectRef idx="2">
-            <a:schemeClr val="accent1"/>
-          </a:effectRef>
-          <a:fontRef idx="minor">
-            <a:schemeClr val="lt1"/>
-          </a:fontRef>
-        </p:style>
-        <p:txBody>
-          <a:bodyPr rtlCol="0" anchor="ctr"/>
-          <a:lstStyle/>
-          <a:p>
-            <a:pPr algn="ctr"/>
-          </a:p>
-        </p:txBody>
-      </p:sp>
-      <p:sp>
-        <p:nvSpPr>
-          <p:cNvPr id="9" name="Isosceles Triangle 8"/>
-          <p:cNvSpPr/>
-          <p:nvPr/>
-        </p:nvSpPr>
-        <p:spPr>
-          <a:xfrm rot="5400000">
-            <a:off x="6021324" y="1673352"/>
-            <a:ext cx="146304" cy="146304"/>
-          </a:xfrm>
-          <a:prstGeom prst="triangle">
-            <a:avLst/>
-          </a:prstGeom>
-          <a:solidFill>
-            <a:srgbClr val="0D9488"/>
-          </a:solidFill>
-          <a:ln>
-            <a:noFill/>
-          </a:ln>
-          <a:effectLst/>
-        </p:spPr>
-        <p:style>
-          <a:lnRef idx="1">
-            <a:schemeClr val="accent1"/>
-          </a:lnRef>
-          <a:fillRef idx="3">
-            <a:schemeClr val="accent1"/>
-          </a:fillRef>
-          <a:effectRef idx="2">
-            <a:schemeClr val="accent1"/>
-          </a:effectRef>
-          <a:fontRef idx="minor">
-            <a:schemeClr val="lt1"/>
-          </a:fontRef>
-        </p:style>
-        <p:txBody>
-          <a:bodyPr rtlCol="0" anchor="ctr"/>
-          <a:lstStyle/>
-          <a:p>
-            <a:pPr algn="ctr"/>
-          </a:p>
-        </p:txBody>
-      </p:sp>
-      <p:sp>
-        <p:nvSpPr>
-          <p:cNvPr id="10" name="Rectangle 9"/>
-          <p:cNvSpPr/>
-          <p:nvPr/>
-        </p:nvSpPr>
-        <p:spPr>
-          <a:xfrm>
-            <a:off x="7622438" y="1730959"/>
-            <a:ext cx="1995220" cy="31089"/>
-          </a:xfrm>
-          <a:prstGeom prst="rect">
-            <a:avLst/>
-          </a:prstGeom>
-          <a:solidFill>
-            <a:srgbClr val="14B8A6"/>
-          </a:solidFill>
-          <a:ln>
-            <a:noFill/>
-          </a:ln>
-          <a:effectLst/>
-        </p:spPr>
-        <p:style>
-          <a:lnRef idx="1">
-            <a:schemeClr val="accent1"/>
-          </a:lnRef>
-          <a:fillRef idx="3">
-            <a:schemeClr val="accent1"/>
-          </a:fillRef>
-          <a:effectRef idx="2">
-            <a:schemeClr val="accent1"/>
-          </a:effectRef>
-          <a:fontRef idx="minor">
-            <a:schemeClr val="lt1"/>
-          </a:fontRef>
-        </p:style>
-        <p:txBody>
-          <a:bodyPr rtlCol="0" anchor="ctr"/>
-          <a:lstStyle/>
-          <a:p>
-            <a:pPr algn="ctr"/>
-          </a:p>
-        </p:txBody>
-      </p:sp>
-      <p:sp>
-        <p:nvSpPr>
-          <p:cNvPr id="11" name="Isosceles Triangle 10"/>
-          <p:cNvSpPr/>
-          <p:nvPr/>
-        </p:nvSpPr>
-        <p:spPr>
-          <a:xfrm rot="5400000">
-            <a:off x="8546896" y="1673352"/>
-            <a:ext cx="146304" cy="146304"/>
-          </a:xfrm>
-          <a:prstGeom prst="triangle">
-            <a:avLst/>
-          </a:prstGeom>
-          <a:solidFill>
-            <a:srgbClr val="0D9488"/>
-          </a:solidFill>
-          <a:ln>
-            <a:noFill/>
-          </a:ln>
-          <a:effectLst/>
-        </p:spPr>
-        <p:style>
-          <a:lnRef idx="1">
-            <a:schemeClr val="accent1"/>
-          </a:lnRef>
-          <a:fillRef idx="3">
-            <a:schemeClr val="accent1"/>
-          </a:fillRef>
-          <a:effectRef idx="2">
-            <a:schemeClr val="accent1"/>
-          </a:effectRef>
-          <a:fontRef idx="minor">
-            <a:schemeClr val="lt1"/>
-          </a:fontRef>
-        </p:style>
-        <p:txBody>
-          <a:bodyPr rtlCol="0" anchor="ctr"/>
-          <a:lstStyle/>
-          <a:p>
-            <a:pPr algn="ctr"/>
-          </a:p>
-        </p:txBody>
-      </p:sp>
-      <p:sp>
-        <p:nvSpPr>
-          <p:cNvPr id="12" name="Oval 11"/>
-          <p:cNvSpPr/>
-          <p:nvPr/>
-        </p:nvSpPr>
-        <p:spPr>
-          <a:xfrm>
-            <a:off x="2040940" y="1481328"/>
-            <a:ext cx="530352" cy="530352"/>
-          </a:xfrm>
-          <a:prstGeom prst="ellipse">
-            <a:avLst/>
-          </a:prstGeom>
-          <a:solidFill>
-            <a:srgbClr val="0D9488"/>
-          </a:solidFill>
-          <a:ln>
-            <a:noFill/>
-          </a:ln>
-          <a:effectLst/>
-        </p:spPr>
-        <p:style>
-          <a:lnRef idx="1">
-            <a:schemeClr val="accent1"/>
-          </a:lnRef>
-          <a:fillRef idx="3">
-            <a:schemeClr val="accent1"/>
-          </a:fillRef>
-          <a:effectRef idx="2">
-            <a:schemeClr val="accent1"/>
-          </a:effectRef>
-          <a:fontRef idx="minor">
-            <a:schemeClr val="lt1"/>
-          </a:fontRef>
-        </p:style>
-        <p:txBody>
-          <a:bodyPr rtlCol="0" anchor="ctr"/>
-          <a:lstStyle/>
-          <a:p>
-            <a:pPr algn="ctr"/>
-          </a:p>
-        </p:txBody>
-      </p:sp>
-      <p:sp>
-        <p:nvSpPr>
-          <p:cNvPr id="13" name="TextBox 12"/>
+          <p:cNvPr id="10" name="TextBox 9"/>
           <p:cNvSpPr txBox="1"/>
           <p:nvPr/>
         </p:nvSpPr>
@@ -7329,7 +7197,7 @@
       </p:sp>
       <p:sp>
         <p:nvSpPr>
-          <p:cNvPr id="14" name="Rounded Rectangle 13"/>
+          <p:cNvPr id="11" name="Rounded Rectangle 10"/>
           <p:cNvSpPr/>
           <p:nvPr/>
         </p:nvSpPr>
@@ -7377,7 +7245,7 @@
       </p:sp>
       <p:sp>
         <p:nvSpPr>
-          <p:cNvPr id="15" name="TextBox 14"/>
+          <p:cNvPr id="12" name="TextBox 11"/>
           <p:cNvSpPr txBox="1"/>
           <p:nvPr/>
         </p:nvSpPr>
@@ -7412,7 +7280,7 @@
       </p:sp>
       <p:sp>
         <p:nvSpPr>
-          <p:cNvPr id="16" name="TextBox 15"/>
+          <p:cNvPr id="13" name="TextBox 12"/>
           <p:cNvSpPr txBox="1"/>
           <p:nvPr/>
         </p:nvSpPr>
@@ -7451,7 +7319,7 @@
       </p:sp>
       <p:sp>
         <p:nvSpPr>
-          <p:cNvPr id="17" name="Oval 16"/>
+          <p:cNvPr id="14" name="Oval 13"/>
           <p:cNvSpPr/>
           <p:nvPr/>
         </p:nvSpPr>
@@ -7495,7 +7363,7 @@
       </p:sp>
       <p:sp>
         <p:nvSpPr>
-          <p:cNvPr id="18" name="TextBox 17"/>
+          <p:cNvPr id="15" name="TextBox 14"/>
           <p:cNvSpPr txBox="1"/>
           <p:nvPr/>
         </p:nvSpPr>
@@ -7530,7 +7398,7 @@
       </p:sp>
       <p:sp>
         <p:nvSpPr>
-          <p:cNvPr id="19" name="Rounded Rectangle 18"/>
+          <p:cNvPr id="16" name="Rounded Rectangle 15"/>
           <p:cNvSpPr/>
           <p:nvPr/>
         </p:nvSpPr>
@@ -7578,7 +7446,7 @@
       </p:sp>
       <p:sp>
         <p:nvSpPr>
-          <p:cNvPr id="20" name="TextBox 19"/>
+          <p:cNvPr id="17" name="TextBox 16"/>
           <p:cNvSpPr txBox="1"/>
           <p:nvPr/>
         </p:nvSpPr>
@@ -7613,7 +7481,7 @@
       </p:sp>
       <p:sp>
         <p:nvSpPr>
-          <p:cNvPr id="21" name="TextBox 20"/>
+          <p:cNvPr id="18" name="TextBox 17"/>
           <p:cNvSpPr txBox="1"/>
           <p:nvPr/>
         </p:nvSpPr>
@@ -7652,7 +7520,7 @@
       </p:sp>
       <p:sp>
         <p:nvSpPr>
-          <p:cNvPr id="22" name="Oval 21"/>
+          <p:cNvPr id="19" name="Oval 18"/>
           <p:cNvSpPr/>
           <p:nvPr/>
         </p:nvSpPr>
@@ -7696,7 +7564,7 @@
       </p:sp>
       <p:sp>
         <p:nvSpPr>
-          <p:cNvPr id="23" name="TextBox 22"/>
+          <p:cNvPr id="20" name="TextBox 19"/>
           <p:cNvSpPr txBox="1"/>
           <p:nvPr/>
         </p:nvSpPr>
@@ -7731,7 +7599,7 @@
       </p:sp>
       <p:sp>
         <p:nvSpPr>
-          <p:cNvPr id="24" name="Rounded Rectangle 23"/>
+          <p:cNvPr id="21" name="Rounded Rectangle 20"/>
           <p:cNvSpPr/>
           <p:nvPr/>
         </p:nvSpPr>
@@ -7779,7 +7647,7 @@
       </p:sp>
       <p:sp>
         <p:nvSpPr>
-          <p:cNvPr id="25" name="TextBox 24"/>
+          <p:cNvPr id="22" name="TextBox 21"/>
           <p:cNvSpPr txBox="1"/>
           <p:nvPr/>
         </p:nvSpPr>
@@ -7814,7 +7682,7 @@
       </p:sp>
       <p:sp>
         <p:nvSpPr>
-          <p:cNvPr id="26" name="TextBox 25"/>
+          <p:cNvPr id="23" name="TextBox 22"/>
           <p:cNvSpPr txBox="1"/>
           <p:nvPr/>
         </p:nvSpPr>
@@ -7853,7 +7721,7 @@
       </p:sp>
       <p:sp>
         <p:nvSpPr>
-          <p:cNvPr id="27" name="Oval 26"/>
+          <p:cNvPr id="24" name="Oval 23"/>
           <p:cNvSpPr/>
           <p:nvPr/>
         </p:nvSpPr>
@@ -7897,7 +7765,7 @@
       </p:sp>
       <p:sp>
         <p:nvSpPr>
-          <p:cNvPr id="28" name="TextBox 27"/>
+          <p:cNvPr id="25" name="TextBox 24"/>
           <p:cNvSpPr txBox="1"/>
           <p:nvPr/>
         </p:nvSpPr>
@@ -7932,7 +7800,7 @@
       </p:sp>
       <p:sp>
         <p:nvSpPr>
-          <p:cNvPr id="29" name="Rounded Rectangle 28"/>
+          <p:cNvPr id="26" name="Rounded Rectangle 25"/>
           <p:cNvSpPr/>
           <p:nvPr/>
         </p:nvSpPr>
@@ -7980,7 +7848,7 @@
       </p:sp>
       <p:sp>
         <p:nvSpPr>
-          <p:cNvPr id="30" name="TextBox 29"/>
+          <p:cNvPr id="27" name="TextBox 26"/>
           <p:cNvSpPr txBox="1"/>
           <p:nvPr/>
         </p:nvSpPr>
@@ -8015,7 +7883,7 @@
       </p:sp>
       <p:sp>
         <p:nvSpPr>
-          <p:cNvPr id="31" name="TextBox 30"/>
+          <p:cNvPr id="28" name="TextBox 27"/>
           <p:cNvSpPr txBox="1"/>
           <p:nvPr/>
         </p:nvSpPr>
@@ -8054,7 +7922,7 @@
       </p:sp>
       <p:sp>
         <p:nvSpPr>
-          <p:cNvPr id="32" name="TextBox 31"/>
+          <p:cNvPr id="29" name="TextBox 28"/>
           <p:cNvSpPr txBox="1"/>
           <p:nvPr/>
         </p:nvSpPr>
@@ -8089,7 +7957,7 @@
       </p:sp>
       <p:sp>
         <p:nvSpPr>
-          <p:cNvPr id="33" name="TextBox 32"/>
+          <p:cNvPr id="30" name="TextBox 29"/>
           <p:cNvSpPr txBox="1"/>
           <p:nvPr/>
         </p:nvSpPr>
@@ -8124,7 +7992,7 @@
       </p:sp>
       <p:sp>
         <p:nvSpPr>
-          <p:cNvPr id="34" name="Rectangle 33"/>
+          <p:cNvPr id="31" name="Rectangle 30"/>
           <p:cNvSpPr/>
           <p:nvPr/>
         </p:nvSpPr>
@@ -8648,7 +8516,7 @@
           <a:p>
             <a:pPr>
               <a:lnSpc>
-                <a:spcPct val="115000"/>
+                <a:spcPct val="149500"/>
               </a:lnSpc>
             </a:pPr>
             <a:r>
@@ -8673,7 +8541,7 @@
           <a:p>
             <a:pPr>
               <a:lnSpc>
-                <a:spcPct val="115000"/>
+                <a:spcPct val="149500"/>
               </a:lnSpc>
             </a:pPr>
             <a:r>
@@ -8698,7 +8566,7 @@
           <a:p>
             <a:pPr>
               <a:lnSpc>
-                <a:spcPct val="115000"/>
+                <a:spcPct val="149500"/>
               </a:lnSpc>
             </a:pPr>
             <a:r>
@@ -9432,7 +9300,7 @@
           <a:p>
             <a:pPr>
               <a:lnSpc>
-                <a:spcPct val="115000"/>
+                <a:spcPct val="149500"/>
               </a:lnSpc>
             </a:pPr>
             <a:r>
@@ -9457,7 +9325,7 @@
           <a:p>
             <a:pPr>
               <a:lnSpc>
-                <a:spcPct val="115000"/>
+                <a:spcPct val="149500"/>
               </a:lnSpc>
             </a:pPr>
             <a:r>
@@ -9482,7 +9350,7 @@
           <a:p>
             <a:pPr>
               <a:lnSpc>
-                <a:spcPct val="115000"/>
+                <a:spcPct val="149500"/>
               </a:lnSpc>
             </a:pPr>
             <a:r>
@@ -9507,7 +9375,7 @@
           <a:p>
             <a:pPr>
               <a:lnSpc>
-                <a:spcPct val="115000"/>
+                <a:spcPct val="149500"/>
               </a:lnSpc>
             </a:pPr>
             <a:r>
@@ -9532,7 +9400,7 @@
           <a:p>
             <a:pPr>
               <a:lnSpc>
-                <a:spcPct val="115000"/>
+                <a:spcPct val="149500"/>
               </a:lnSpc>
             </a:pPr>
             <a:r>
@@ -9557,7 +9425,7 @@
           <a:p>
             <a:pPr>
               <a:lnSpc>
-                <a:spcPct val="115000"/>
+                <a:spcPct val="149500"/>
               </a:lnSpc>
             </a:pPr>
             <a:r>
@@ -9582,7 +9450,7 @@
           <a:p>
             <a:pPr>
               <a:lnSpc>
-                <a:spcPct val="115000"/>
+                <a:spcPct val="149500"/>
               </a:lnSpc>
             </a:pPr>
             <a:r>
@@ -9607,7 +9475,7 @@
           <a:p>
             <a:pPr>
               <a:lnSpc>
-                <a:spcPct val="115000"/>
+                <a:spcPct val="149500"/>
               </a:lnSpc>
             </a:pPr>
             <a:r>
@@ -9998,7 +9866,7 @@
           <a:p>
             <a:pPr>
               <a:lnSpc>
-                <a:spcPct val="115000"/>
+                <a:spcPct val="149500"/>
               </a:lnSpc>
             </a:pPr>
             <a:r>
@@ -10023,7 +9891,7 @@
           <a:p>
             <a:pPr>
               <a:lnSpc>
-                <a:spcPct val="115000"/>
+                <a:spcPct val="149500"/>
               </a:lnSpc>
             </a:pPr>
             <a:r>
@@ -10048,7 +9916,7 @@
           <a:p>
             <a:pPr>
               <a:lnSpc>
-                <a:spcPct val="115000"/>
+                <a:spcPct val="149500"/>
               </a:lnSpc>
             </a:pPr>
             <a:r>
@@ -10711,7 +10579,7 @@
           <a:p>
             <a:pPr>
               <a:lnSpc>
-                <a:spcPct val="115000"/>
+                <a:spcPct val="149500"/>
               </a:lnSpc>
             </a:pPr>
             <a:r>
@@ -10736,7 +10604,7 @@
           <a:p>
             <a:pPr>
               <a:lnSpc>
-                <a:spcPct val="115000"/>
+                <a:spcPct val="149500"/>
               </a:lnSpc>
             </a:pPr>
             <a:r>
@@ -10761,7 +10629,7 @@
           <a:p>
             <a:pPr>
               <a:lnSpc>
-                <a:spcPct val="115000"/>
+                <a:spcPct val="149500"/>
               </a:lnSpc>
             </a:pPr>
             <a:r>

--- a/class/cloud_infra_mgmt/11주차_Jenkins_CICD기초/01_강의자료/2차시_DockerCompose로Jenkins설치.pptx
+++ b/class/cloud_infra_mgmt/11주차_Jenkins_CICD기초/01_강의자료/2차시_DockerCompose로Jenkins설치.pptx
@@ -4901,6 +4901,8 @@
                   <a:srgbClr val="14B8A6"/>
                 </a:solidFill>
                 <a:latin typeface="맑은 고딕"/>
+                <a:ea typeface="맑은 고딕"/>
+                <a:cs typeface="맑은 고딕"/>
               </a:rPr>
               <a:t>클라우드인프라관리  ·  11주차 2차시</a:t>
             </a:r>
@@ -4936,6 +4938,8 @@
                   <a:srgbClr val="FFFFFF"/>
                 </a:solidFill>
                 <a:latin typeface="맑은 고딕"/>
+                <a:ea typeface="맑은 고딕"/>
+                <a:cs typeface="맑은 고딕"/>
               </a:rPr>
               <a:t>Docker Compose로 Jenkins 설치</a:t>
             </a:r>
@@ -4971,6 +4975,8 @@
                   <a:srgbClr val="C9D3E6"/>
                 </a:solidFill>
                 <a:latin typeface="맑은 고딕"/>
+                <a:ea typeface="맑은 고딕"/>
+                <a:cs typeface="맑은 고딕"/>
               </a:rPr>
               <a:t>VM에 나만의 Jenkins 서버를 영구적으로 띄우기</a:t>
             </a:r>
@@ -5006,6 +5012,8 @@
                   <a:srgbClr val="FFFFFF"/>
                 </a:solidFill>
                 <a:latin typeface="맑은 고딕"/>
+                <a:ea typeface="맑은 고딕"/>
+                <a:cs typeface="맑은 고딕"/>
               </a:rPr>
               <a:t>영남이공대학교 김지윤교수</a:t>
             </a:r>
@@ -5165,6 +5173,8 @@
                   <a:srgbClr val="14213D"/>
                 </a:solidFill>
                 <a:latin typeface="맑은 고딕"/>
+                <a:ea typeface="맑은 고딕"/>
+                <a:cs typeface="맑은 고딕"/>
               </a:rPr>
               <a:t>03</a:t>
             </a:r>
@@ -5200,6 +5210,8 @@
                   <a:srgbClr val="14B8A6"/>
                 </a:solidFill>
                 <a:latin typeface="맑은 고딕"/>
+                <a:ea typeface="맑은 고딕"/>
+                <a:cs typeface="맑은 고딕"/>
               </a:rPr>
               <a:t>실습 안내</a:t>
             </a:r>
@@ -5235,6 +5247,8 @@
                   <a:srgbClr val="FFFFFF"/>
                 </a:solidFill>
                 <a:latin typeface="맑은 고딕"/>
+                <a:ea typeface="맑은 고딕"/>
+                <a:cs typeface="맑은 고딕"/>
               </a:rPr>
               <a:t>Killercoda — Compose 문법 빈칸 채우기</a:t>
             </a:r>
@@ -5274,6 +5288,8 @@
                   <a:srgbClr val="0D9488"/>
                 </a:solidFill>
                 <a:latin typeface="맑은 고딕"/>
+                <a:ea typeface="맑은 고딕"/>
+                <a:cs typeface="맑은 고딕"/>
               </a:rPr>
               <a:t>●  </a:t>
             </a:r>
@@ -5283,6 +5299,8 @@
                   <a:srgbClr val="222733"/>
                 </a:solidFill>
                 <a:latin typeface="맑은 고딕"/>
+                <a:ea typeface="맑은 고딕"/>
+                <a:cs typeface="맑은 고딕"/>
               </a:rPr>
               <a:t>뼈대만 있는 docker-compose.yml에서 image·ports·volumes 빈칸 채우기</a:t>
             </a:r>
@@ -5299,6 +5317,8 @@
                   <a:srgbClr val="0D9488"/>
                 </a:solidFill>
                 <a:latin typeface="맑은 고딕"/>
+                <a:ea typeface="맑은 고딕"/>
+                <a:cs typeface="맑은 고딕"/>
               </a:rPr>
               <a:t>●  </a:t>
             </a:r>
@@ -5308,6 +5328,8 @@
                   <a:srgbClr val="222733"/>
                 </a:solidFill>
                 <a:latin typeface="맑은 고딕"/>
+                <a:ea typeface="맑은 고딕"/>
+                <a:cs typeface="맑은 고딕"/>
               </a:rPr>
               <a:t>docker compose up -d 로 실행 후 docker compose logs로 컨테이너 상태 확인</a:t>
             </a:r>
@@ -5324,6 +5346,8 @@
                   <a:srgbClr val="0D9488"/>
                 </a:solidFill>
                 <a:latin typeface="맑은 고딕"/>
+                <a:ea typeface="맑은 고딕"/>
+                <a:cs typeface="맑은 고딕"/>
               </a:rPr>
               <a:t>●  </a:t>
             </a:r>
@@ -5333,6 +5357,8 @@
                   <a:srgbClr val="222733"/>
                 </a:solidFill>
                 <a:latin typeface="맑은 고딕"/>
+                <a:ea typeface="맑은 고딕"/>
+                <a:cs typeface="맑은 고딕"/>
               </a:rPr>
               <a:t>완성한 설정이 왜 그렇게 구성되는지 스스로 설명해보기</a:t>
             </a:r>
@@ -5368,6 +5394,8 @@
                   <a:srgbClr val="5B6373"/>
                 </a:solidFill>
                 <a:latin typeface="맑은 고딕"/>
+                <a:ea typeface="맑은 고딕"/>
+                <a:cs typeface="맑은 고딕"/>
               </a:rPr>
               <a:t>클라우드인프라관리  ·  11주차 2차시</a:t>
             </a:r>
@@ -5403,6 +5431,8 @@
                   <a:srgbClr val="5B6373"/>
                 </a:solidFill>
                 <a:latin typeface="맑은 고딕"/>
+                <a:ea typeface="맑은 고딕"/>
+                <a:cs typeface="맑은 고딕"/>
               </a:rPr>
               <a:t>10 / 13</a:t>
             </a:r>
@@ -5606,6 +5636,8 @@
                   <a:srgbClr val="14213D"/>
                 </a:solidFill>
                 <a:latin typeface="맑은 고딕"/>
+                <a:ea typeface="맑은 고딕"/>
+                <a:cs typeface="맑은 고딕"/>
               </a:rPr>
               <a:t>03</a:t>
             </a:r>
@@ -5641,6 +5673,8 @@
                   <a:srgbClr val="14B8A6"/>
                 </a:solidFill>
                 <a:latin typeface="맑은 고딕"/>
+                <a:ea typeface="맑은 고딕"/>
+                <a:cs typeface="맑은 고딕"/>
               </a:rPr>
               <a:t>실습 안내</a:t>
             </a:r>
@@ -5676,6 +5710,8 @@
                   <a:srgbClr val="FFFFFF"/>
                 </a:solidFill>
                 <a:latin typeface="맑은 고딕"/>
+                <a:ea typeface="맑은 고딕"/>
+                <a:cs typeface="맑은 고딕"/>
               </a:rPr>
               <a:t>VM 안내 — Jenkins 설치 실습</a:t>
             </a:r>
@@ -5715,6 +5751,8 @@
                   <a:srgbClr val="0D9488"/>
                 </a:solidFill>
                 <a:latin typeface="맑은 고딕"/>
+                <a:ea typeface="맑은 고딕"/>
+                <a:cs typeface="맑은 고딕"/>
               </a:rPr>
               <a:t>●  </a:t>
             </a:r>
@@ -5724,6 +5762,8 @@
                   <a:srgbClr val="222733"/>
                 </a:solidFill>
                 <a:latin typeface="맑은 고딕"/>
+                <a:ea typeface="맑은 고딕"/>
+                <a:cs typeface="맑은 고딕"/>
               </a:rPr>
               <a:t>개인 VM에 docker-compose.yml 작성 후 docker compose up -d 실행</a:t>
             </a:r>
@@ -5740,6 +5780,8 @@
                   <a:srgbClr val="0D9488"/>
                 </a:solidFill>
                 <a:latin typeface="맑은 고딕"/>
+                <a:ea typeface="맑은 고딕"/>
+                <a:cs typeface="맑은 고딕"/>
               </a:rPr>
               <a:t>●  </a:t>
             </a:r>
@@ -5749,6 +5791,8 @@
                   <a:srgbClr val="222733"/>
                 </a:solidFill>
                 <a:latin typeface="맑은 고딕"/>
+                <a:ea typeface="맑은 고딕"/>
+                <a:cs typeface="맑은 고딕"/>
               </a:rPr>
               <a:t>docker compose logs jenkins 로 초기 관리자 비밀번호 확인</a:t>
             </a:r>
@@ -5765,6 +5809,8 @@
                   <a:srgbClr val="0D9488"/>
                 </a:solidFill>
                 <a:latin typeface="맑은 고딕"/>
+                <a:ea typeface="맑은 고딕"/>
+                <a:cs typeface="맑은 고딕"/>
               </a:rPr>
               <a:t>●  </a:t>
             </a:r>
@@ -5774,6 +5820,8 @@
                   <a:srgbClr val="222733"/>
                 </a:solidFill>
                 <a:latin typeface="맑은 고딕"/>
+                <a:ea typeface="맑은 고딕"/>
+                <a:cs typeface="맑은 고딕"/>
               </a:rPr>
               <a:t>localhost:8080 접속 → 초기 비밀번호 입력 → 로그인 화면까지 캡처</a:t>
             </a:r>
@@ -5790,6 +5838,8 @@
                   <a:srgbClr val="DC2626"/>
                 </a:solidFill>
                 <a:latin typeface="맑은 고딕"/>
+                <a:ea typeface="맑은 고딕"/>
+                <a:cs typeface="맑은 고딕"/>
               </a:rPr>
               <a:t>●  </a:t>
             </a:r>
@@ -5799,6 +5849,8 @@
                   <a:srgbClr val="222733"/>
                 </a:solidFill>
                 <a:latin typeface="맑은 고딕"/>
+                <a:ea typeface="맑은 고딕"/>
+                <a:cs typeface="맑은 고딕"/>
               </a:rPr>
               <a:t>플러그인 설치·계정 생성은 다음 3차시에 이어서 진행합니다</a:t>
             </a:r>
@@ -5834,6 +5886,8 @@
                   <a:srgbClr val="5B6373"/>
                 </a:solidFill>
                 <a:latin typeface="맑은 고딕"/>
+                <a:ea typeface="맑은 고딕"/>
+                <a:cs typeface="맑은 고딕"/>
               </a:rPr>
               <a:t>클라우드인프라관리  ·  11주차 2차시</a:t>
             </a:r>
@@ -5869,6 +5923,8 @@
                   <a:srgbClr val="5B6373"/>
                 </a:solidFill>
                 <a:latin typeface="맑은 고딕"/>
+                <a:ea typeface="맑은 고딕"/>
+                <a:cs typeface="맑은 고딕"/>
               </a:rPr>
               <a:t>11 / 13</a:t>
             </a:r>
@@ -6054,6 +6110,8 @@
                   <a:srgbClr val="FFFFFF"/>
                 </a:solidFill>
                 <a:latin typeface="맑은 고딕"/>
+                <a:ea typeface="맑은 고딕"/>
+                <a:cs typeface="맑은 고딕"/>
               </a:rPr>
               <a:t>오늘의 정리</a:t>
             </a:r>
@@ -6107,6 +6165,8 @@
                   <a:srgbClr val="14213D"/>
                 </a:solidFill>
                 <a:latin typeface="맑은 고딕"/>
+                <a:ea typeface="맑은 고딕"/>
+                <a:cs typeface="맑은 고딕"/>
               </a:rPr>
               <a:t>1</a:t>
             </a:r>
@@ -6142,6 +6202,8 @@
                   <a:srgbClr val="FFFFFF"/>
                 </a:solidFill>
                 <a:latin typeface="맑은 고딕"/>
+                <a:ea typeface="맑은 고딕"/>
+                <a:cs typeface="맑은 고딕"/>
               </a:rPr>
               <a:t>Named Volume(jenkins_home)으로 컨테이너를 껐다 켜도 Jenkins 설정이 유지되게 한다</a:t>
             </a:r>
@@ -6195,6 +6257,8 @@
                   <a:srgbClr val="14213D"/>
                 </a:solidFill>
                 <a:latin typeface="맑은 고딕"/>
+                <a:ea typeface="맑은 고딕"/>
+                <a:cs typeface="맑은 고딕"/>
               </a:rPr>
               <a:t>2</a:t>
             </a:r>
@@ -6230,6 +6294,8 @@
                   <a:srgbClr val="FFFFFF"/>
                 </a:solidFill>
                 <a:latin typeface="맑은 고딕"/>
+                <a:ea typeface="맑은 고딕"/>
+                <a:cs typeface="맑은 고딕"/>
               </a:rPr>
               <a:t>docker.sock을 마운트하면 Jenkins 컨테이너 안에서도 호스트 Docker를 직접 제어할 수 있다</a:t>
             </a:r>
@@ -6371,6 +6437,8 @@
                   <a:srgbClr val="FFFFFF"/>
                 </a:solidFill>
                 <a:latin typeface="맑은 고딕"/>
+                <a:ea typeface="맑은 고딕"/>
+                <a:cs typeface="맑은 고딕"/>
               </a:rPr>
               <a:t>다음 차시 예고</a:t>
             </a:r>
@@ -6406,6 +6474,8 @@
                   <a:srgbClr val="14B8A6"/>
                 </a:solidFill>
                 <a:latin typeface="맑은 고딕"/>
+                <a:ea typeface="맑은 고딕"/>
+                <a:cs typeface="맑은 고딕"/>
               </a:rPr>
               <a:t>다음 차시 예고 — 11주차 3차시</a:t>
             </a:r>
@@ -6441,6 +6511,8 @@
                   <a:srgbClr val="FFFFFF"/>
                 </a:solidFill>
                 <a:latin typeface="맑은 고딕"/>
+                <a:ea typeface="맑은 고딕"/>
+                <a:cs typeface="맑은 고딕"/>
               </a:rPr>
               <a:t>플러그인을 초기 설정하고 관리자 계정을 만든 뒤, 처음으로 나만의 Job을 생성해봅니다.</a:t>
             </a:r>
@@ -6582,6 +6654,8 @@
                   <a:srgbClr val="14B8A6"/>
                 </a:solidFill>
                 <a:latin typeface="맑은 고딕"/>
+                <a:ea typeface="맑은 고딕"/>
+                <a:cs typeface="맑은 고딕"/>
               </a:rPr>
               <a:t>SESSION OVERVIEW</a:t>
             </a:r>
@@ -6617,6 +6691,8 @@
                   <a:srgbClr val="FFFFFF"/>
                 </a:solidFill>
                 <a:latin typeface="맑은 고딕"/>
+                <a:ea typeface="맑은 고딕"/>
+                <a:cs typeface="맑은 고딕"/>
               </a:rPr>
               <a:t>오늘의 학습 목표</a:t>
             </a:r>
@@ -6656,6 +6732,8 @@
                   <a:srgbClr val="222733"/>
                 </a:solidFill>
                 <a:latin typeface="맑은 고딕"/>
+                <a:ea typeface="맑은 고딕"/>
+                <a:cs typeface="맑은 고딕"/>
               </a:rPr>
               <a:t>1.  docker-compose.yml로 Jenkins를 영구 설치하는 방법을 이해한다</a:t>
             </a:r>
@@ -6672,6 +6750,8 @@
                   <a:srgbClr val="222733"/>
                 </a:solidFill>
                 <a:latin typeface="맑은 고딕"/>
+                <a:ea typeface="맑은 고딕"/>
+                <a:cs typeface="맑은 고딕"/>
               </a:rPr>
               <a:t>2.  Jenkins 컨테이너가 Docker와 통신하는 원리(docker.sock)를 이해한다</a:t>
             </a:r>
@@ -6688,6 +6768,8 @@
                   <a:srgbClr val="222733"/>
                 </a:solidFill>
                 <a:latin typeface="맑은 고딕"/>
+                <a:ea typeface="맑은 고딕"/>
+                <a:cs typeface="맑은 고딕"/>
               </a:rPr>
               <a:t>3.  개인 VM에 Jenkins를 설치하고 초기 로그인까지 완료한다</a:t>
             </a:r>
@@ -6723,6 +6805,8 @@
                   <a:srgbClr val="5B6373"/>
                 </a:solidFill>
                 <a:latin typeface="맑은 고딕"/>
+                <a:ea typeface="맑은 고딕"/>
+                <a:cs typeface="맑은 고딕"/>
               </a:rPr>
               <a:t>클라우드인프라관리  ·  11주차 2차시</a:t>
             </a:r>
@@ -6758,6 +6842,8 @@
                   <a:srgbClr val="5B6373"/>
                 </a:solidFill>
                 <a:latin typeface="맑은 고딕"/>
+                <a:ea typeface="맑은 고딕"/>
+                <a:cs typeface="맑은 고딕"/>
               </a:rPr>
               <a:t>02 / 13</a:t>
             </a:r>
@@ -6943,6 +7029,8 @@
                   <a:srgbClr val="14B8A6"/>
                 </a:solidFill>
                 <a:latin typeface="맑은 고딕"/>
+                <a:ea typeface="맑은 고딕"/>
+                <a:cs typeface="맑은 고딕"/>
               </a:rPr>
               <a:t>SESSION OVERVIEW</a:t>
             </a:r>
@@ -6978,6 +7066,8 @@
                   <a:srgbClr val="FFFFFF"/>
                 </a:solidFill>
                 <a:latin typeface="맑은 고딕"/>
+                <a:ea typeface="맑은 고딕"/>
+                <a:cs typeface="맑은 고딕"/>
               </a:rPr>
               <a:t>오늘의 진행 순서</a:t>
             </a:r>
@@ -7189,6 +7279,8 @@
                   <a:srgbClr val="FFFFFF"/>
                 </a:solidFill>
                 <a:latin typeface="맑은 고딕"/>
+                <a:ea typeface="맑은 고딕"/>
+                <a:cs typeface="맑은 고딕"/>
               </a:rPr>
               <a:t>1</a:t>
             </a:r>
@@ -7272,6 +7364,8 @@
                   <a:srgbClr val="14213D"/>
                 </a:solidFill>
                 <a:latin typeface="맑은 고딕"/>
+                <a:ea typeface="맑은 고딕"/>
+                <a:cs typeface="맑은 고딕"/>
               </a:rPr>
               <a:t>개념 설명</a:t>
             </a:r>
@@ -7311,6 +7405,8 @@
                   <a:srgbClr val="222733"/>
                 </a:solidFill>
                 <a:latin typeface="맑은 고딕"/>
+                <a:ea typeface="맑은 고딕"/>
+                <a:cs typeface="맑은 고딕"/>
               </a:rPr>
               <a:t>강의자료 기반 직접 강의</a:t>
             </a:r>
@@ -7390,6 +7486,8 @@
                   <a:srgbClr val="FFFFFF"/>
                 </a:solidFill>
                 <a:latin typeface="맑은 고딕"/>
+                <a:ea typeface="맑은 고딕"/>
+                <a:cs typeface="맑은 고딕"/>
               </a:rPr>
               <a:t>2</a:t>
             </a:r>
@@ -7473,6 +7571,8 @@
                   <a:srgbClr val="14213D"/>
                 </a:solidFill>
                 <a:latin typeface="맑은 고딕"/>
+                <a:ea typeface="맑은 고딕"/>
+                <a:cs typeface="맑은 고딕"/>
               </a:rPr>
               <a:t>Killercoda</a:t>
             </a:r>
@@ -7512,6 +7612,8 @@
                   <a:srgbClr val="222733"/>
                 </a:solidFill>
                 <a:latin typeface="맑은 고딕"/>
+                <a:ea typeface="맑은 고딕"/>
+                <a:cs typeface="맑은 고딕"/>
               </a:rPr>
               <a:t>Compose 문법 빈칸 채우기</a:t>
             </a:r>
@@ -7591,6 +7693,8 @@
                   <a:srgbClr val="FFFFFF"/>
                 </a:solidFill>
                 <a:latin typeface="맑은 고딕"/>
+                <a:ea typeface="맑은 고딕"/>
+                <a:cs typeface="맑은 고딕"/>
               </a:rPr>
               <a:t>3</a:t>
             </a:r>
@@ -7674,6 +7778,8 @@
                   <a:srgbClr val="14213D"/>
                 </a:solidFill>
                 <a:latin typeface="맑은 고딕"/>
+                <a:ea typeface="맑은 고딕"/>
+                <a:cs typeface="맑은 고딕"/>
               </a:rPr>
               <a:t>VM 안내</a:t>
             </a:r>
@@ -7713,6 +7819,8 @@
                   <a:srgbClr val="222733"/>
                 </a:solidFill>
                 <a:latin typeface="맑은 고딕"/>
+                <a:ea typeface="맑은 고딕"/>
+                <a:cs typeface="맑은 고딕"/>
               </a:rPr>
               <a:t>Jenkins 설치 실습</a:t>
             </a:r>
@@ -7792,6 +7900,8 @@
                   <a:srgbClr val="FFFFFF"/>
                 </a:solidFill>
                 <a:latin typeface="맑은 고딕"/>
+                <a:ea typeface="맑은 고딕"/>
+                <a:cs typeface="맑은 고딕"/>
               </a:rPr>
               <a:t>4</a:t>
             </a:r>
@@ -7875,6 +7985,8 @@
                   <a:srgbClr val="14213D"/>
                 </a:solidFill>
                 <a:latin typeface="맑은 고딕"/>
+                <a:ea typeface="맑은 고딕"/>
+                <a:cs typeface="맑은 고딕"/>
               </a:rPr>
               <a:t>결과 제출</a:t>
             </a:r>
@@ -7914,6 +8026,8 @@
                   <a:srgbClr val="222733"/>
                 </a:solidFill>
                 <a:latin typeface="맑은 고딕"/>
+                <a:ea typeface="맑은 고딕"/>
+                <a:cs typeface="맑은 고딕"/>
               </a:rPr>
               <a:t>체크리스트 제출</a:t>
             </a:r>
@@ -7949,6 +8063,8 @@
                   <a:srgbClr val="5B6373"/>
                 </a:solidFill>
                 <a:latin typeface="맑은 고딕"/>
+                <a:ea typeface="맑은 고딕"/>
+                <a:cs typeface="맑은 고딕"/>
               </a:rPr>
               <a:t>클라우드인프라관리  ·  11주차 2차시</a:t>
             </a:r>
@@ -7984,6 +8100,8 @@
                   <a:srgbClr val="5B6373"/>
                 </a:solidFill>
                 <a:latin typeface="맑은 고딕"/>
+                <a:ea typeface="맑은 고딕"/>
+                <a:cs typeface="맑은 고딕"/>
               </a:rPr>
               <a:t>03 / 13</a:t>
             </a:r>
@@ -8187,6 +8305,8 @@
                   <a:srgbClr val="14213D"/>
                 </a:solidFill>
                 <a:latin typeface="맑은 고딕"/>
+                <a:ea typeface="맑은 고딕"/>
+                <a:cs typeface="맑은 고딕"/>
               </a:rPr>
               <a:t>PART 01</a:t>
             </a:r>
@@ -8222,6 +8342,8 @@
                   <a:srgbClr val="FFFFFF"/>
                 </a:solidFill>
                 <a:latin typeface="맑은 고딕"/>
+                <a:ea typeface="맑은 고딕"/>
+                <a:cs typeface="맑은 고딕"/>
               </a:rPr>
               <a:t>왜 Docker Compose로 설치하는가</a:t>
             </a:r>
@@ -8257,6 +8379,8 @@
                   <a:srgbClr val="C9D3E6"/>
                 </a:solidFill>
                 <a:latin typeface="맑은 고딕"/>
+                <a:ea typeface="맑은 고딕"/>
+                <a:cs typeface="맑은 고딕"/>
               </a:rPr>
               <a:t>임시 컨테이너와 영구 설치의 차이</a:t>
             </a:r>
@@ -8416,6 +8540,8 @@
                   <a:srgbClr val="14213D"/>
                 </a:solidFill>
                 <a:latin typeface="맑은 고딕"/>
+                <a:ea typeface="맑은 고딕"/>
+                <a:cs typeface="맑은 고딕"/>
               </a:rPr>
               <a:t>01</a:t>
             </a:r>
@@ -8451,6 +8577,8 @@
                   <a:srgbClr val="14B8A6"/>
                 </a:solidFill>
                 <a:latin typeface="맑은 고딕"/>
+                <a:ea typeface="맑은 고딕"/>
+                <a:cs typeface="맑은 고딕"/>
               </a:rPr>
               <a:t>PART 1 · 설치 방식</a:t>
             </a:r>
@@ -8486,6 +8614,8 @@
                   <a:srgbClr val="FFFFFF"/>
                 </a:solidFill>
                 <a:latin typeface="맑은 고딕"/>
+                <a:ea typeface="맑은 고딕"/>
+                <a:cs typeface="맑은 고딕"/>
               </a:rPr>
               <a:t>1차시의 임시 Jenkins와 오늘의 차이</a:t>
             </a:r>
@@ -8525,6 +8655,8 @@
                   <a:srgbClr val="0D9488"/>
                 </a:solidFill>
                 <a:latin typeface="맑은 고딕"/>
+                <a:ea typeface="맑은 고딕"/>
+                <a:cs typeface="맑은 고딕"/>
               </a:rPr>
               <a:t>●  </a:t>
             </a:r>
@@ -8534,6 +8666,8 @@
                   <a:srgbClr val="222733"/>
                 </a:solidFill>
                 <a:latin typeface="맑은 고딕"/>
+                <a:ea typeface="맑은 고딕"/>
+                <a:cs typeface="맑은 고딕"/>
               </a:rPr>
               <a:t>1차시 Killercoda의 Jenkins는 docker run으로 띄운 '임시' 컨테이너 — 데이터가 저장되지 않음</a:t>
             </a:r>
@@ -8550,6 +8684,8 @@
                   <a:srgbClr val="0D9488"/>
                 </a:solidFill>
                 <a:latin typeface="맑은 고딕"/>
+                <a:ea typeface="맑은 고딕"/>
+                <a:cs typeface="맑은 고딕"/>
               </a:rPr>
               <a:t>●  </a:t>
             </a:r>
@@ -8559,6 +8695,8 @@
                   <a:srgbClr val="222733"/>
                 </a:solidFill>
                 <a:latin typeface="맑은 고딕"/>
+                <a:ea typeface="맑은 고딕"/>
+                <a:cs typeface="맑은 고딕"/>
               </a:rPr>
               <a:t>오늘 VM에 설치하는 Jenkins는 13주차까지 계속 쓸 '영구' 서버 — 설정과 Job이 계속 유지되어야 함</a:t>
             </a:r>
@@ -8575,6 +8713,8 @@
                   <a:srgbClr val="0D9488"/>
                 </a:solidFill>
                 <a:latin typeface="맑은 고딕"/>
+                <a:ea typeface="맑은 고딕"/>
+                <a:cs typeface="맑은 고딕"/>
               </a:rPr>
               <a:t>●  </a:t>
             </a:r>
@@ -8584,6 +8724,8 @@
                   <a:srgbClr val="222733"/>
                 </a:solidFill>
                 <a:latin typeface="맑은 고딕"/>
+                <a:ea typeface="맑은 고딕"/>
+                <a:cs typeface="맑은 고딕"/>
               </a:rPr>
               <a:t>docker-compose.yml로 볼륨(jenkins_home)을 지정해, 컨테이너를 껐다 켜도 데이터가 유지되게 함</a:t>
             </a:r>
@@ -8663,6 +8805,8 @@
                   <a:srgbClr val="FFFFFF"/>
                 </a:solidFill>
                 <a:latin typeface="맑은 고딕"/>
+                <a:ea typeface="맑은 고딕"/>
+                <a:cs typeface="맑은 고딕"/>
               </a:rPr>
               <a:t>🔗  2주차 연결</a:t>
             </a:r>
@@ -8698,6 +8842,8 @@
                   <a:srgbClr val="FFFFFF"/>
                 </a:solidFill>
                 <a:latin typeface="맑은 고딕"/>
+                <a:ea typeface="맑은 고딕"/>
+                <a:cs typeface="맑은 고딕"/>
               </a:rPr>
               <a:t>2주차에서 배운 Named Volume 개념이 여기서 그대로 쓰입니다</a:t>
             </a:r>
@@ -8733,6 +8879,8 @@
                   <a:srgbClr val="5B6373"/>
                 </a:solidFill>
                 <a:latin typeface="맑은 고딕"/>
+                <a:ea typeface="맑은 고딕"/>
+                <a:cs typeface="맑은 고딕"/>
               </a:rPr>
               <a:t>클라우드인프라관리  ·  11주차 2차시</a:t>
             </a:r>
@@ -8768,6 +8916,8 @@
                   <a:srgbClr val="5B6373"/>
                 </a:solidFill>
                 <a:latin typeface="맑은 고딕"/>
+                <a:ea typeface="맑은 고딕"/>
+                <a:cs typeface="맑은 고딕"/>
               </a:rPr>
               <a:t>05 / 13</a:t>
             </a:r>
@@ -8971,6 +9121,8 @@
                   <a:srgbClr val="14213D"/>
                 </a:solidFill>
                 <a:latin typeface="맑은 고딕"/>
+                <a:ea typeface="맑은 고딕"/>
+                <a:cs typeface="맑은 고딕"/>
               </a:rPr>
               <a:t>PART 02</a:t>
             </a:r>
@@ -9006,6 +9158,8 @@
                   <a:srgbClr val="FFFFFF"/>
                 </a:solidFill>
                 <a:latin typeface="맑은 고딕"/>
+                <a:ea typeface="맑은 고딕"/>
+                <a:cs typeface="맑은 고딕"/>
               </a:rPr>
               <a:t>docker-compose.yml 뜯어보기</a:t>
             </a:r>
@@ -9041,6 +9195,8 @@
                   <a:srgbClr val="C9D3E6"/>
                 </a:solidFill>
                 <a:latin typeface="맑은 고딕"/>
+                <a:ea typeface="맑은 고딕"/>
+                <a:cs typeface="맑은 고딕"/>
               </a:rPr>
               <a:t>설정 한 줄 한 줄의 의미</a:t>
             </a:r>
@@ -9200,6 +9356,8 @@
                   <a:srgbClr val="14213D"/>
                 </a:solidFill>
                 <a:latin typeface="맑은 고딕"/>
+                <a:ea typeface="맑은 고딕"/>
+                <a:cs typeface="맑은 고딕"/>
               </a:rPr>
               <a:t>02</a:t>
             </a:r>
@@ -9235,6 +9393,8 @@
                   <a:srgbClr val="14B8A6"/>
                 </a:solidFill>
                 <a:latin typeface="맑은 고딕"/>
+                <a:ea typeface="맑은 고딕"/>
+                <a:cs typeface="맑은 고딕"/>
               </a:rPr>
               <a:t>PART 2 · Compose 설정</a:t>
             </a:r>
@@ -9270,6 +9430,8 @@
                   <a:srgbClr val="FFFFFF"/>
                 </a:solidFill>
                 <a:latin typeface="맑은 고딕"/>
+                <a:ea typeface="맑은 고딕"/>
+                <a:cs typeface="맑은 고딕"/>
               </a:rPr>
               <a:t>Jenkins docker-compose.yml (검증 완료)</a:t>
             </a:r>
@@ -9309,6 +9471,8 @@
                   <a:srgbClr val="0D9488"/>
                 </a:solidFill>
                 <a:latin typeface="맑은 고딕"/>
+                <a:ea typeface="맑은 고딕"/>
+                <a:cs typeface="맑은 고딕"/>
               </a:rPr>
               <a:t>●  </a:t>
             </a:r>
@@ -9318,6 +9482,8 @@
                   <a:srgbClr val="222733"/>
                 </a:solidFill>
                 <a:latin typeface="맑은 고딕"/>
+                <a:ea typeface="맑은 고딕"/>
+                <a:cs typeface="맑은 고딕"/>
               </a:rPr>
               <a:t>services:</a:t>
             </a:r>
@@ -9334,6 +9500,8 @@
                   <a:srgbClr val="0D9488"/>
                 </a:solidFill>
                 <a:latin typeface="맑은 고딕"/>
+                <a:ea typeface="맑은 고딕"/>
+                <a:cs typeface="맑은 고딕"/>
               </a:rPr>
               <a:t>●  </a:t>
             </a:r>
@@ -9343,6 +9511,8 @@
                   <a:srgbClr val="222733"/>
                 </a:solidFill>
                 <a:latin typeface="맑은 고딕"/>
+                <a:ea typeface="맑은 고딕"/>
+                <a:cs typeface="맑은 고딕"/>
               </a:rPr>
               <a:t>  jenkins:</a:t>
             </a:r>
@@ -9359,6 +9529,8 @@
                   <a:srgbClr val="0D9488"/>
                 </a:solidFill>
                 <a:latin typeface="맑은 고딕"/>
+                <a:ea typeface="맑은 고딕"/>
+                <a:cs typeface="맑은 고딕"/>
               </a:rPr>
               <a:t>●  </a:t>
             </a:r>
@@ -9368,6 +9540,8 @@
                   <a:srgbClr val="222733"/>
                 </a:solidFill>
                 <a:latin typeface="맑은 고딕"/>
+                <a:ea typeface="맑은 고딕"/>
+                <a:cs typeface="맑은 고딕"/>
               </a:rPr>
               <a:t>    image: jenkins/jenkins:lts</a:t>
             </a:r>
@@ -9384,6 +9558,8 @@
                   <a:srgbClr val="0D9488"/>
                 </a:solidFill>
                 <a:latin typeface="맑은 고딕"/>
+                <a:ea typeface="맑은 고딕"/>
+                <a:cs typeface="맑은 고딕"/>
               </a:rPr>
               <a:t>●  </a:t>
             </a:r>
@@ -9393,6 +9569,8 @@
                   <a:srgbClr val="222733"/>
                 </a:solidFill>
                 <a:latin typeface="맑은 고딕"/>
+                <a:ea typeface="맑은 고딕"/>
+                <a:cs typeface="맑은 고딕"/>
               </a:rPr>
               <a:t>    ports: ["8080:8080", "50000:50000"]</a:t>
             </a:r>
@@ -9409,6 +9587,8 @@
                   <a:srgbClr val="0D9488"/>
                 </a:solidFill>
                 <a:latin typeface="맑은 고딕"/>
+                <a:ea typeface="맑은 고딕"/>
+                <a:cs typeface="맑은 고딕"/>
               </a:rPr>
               <a:t>●  </a:t>
             </a:r>
@@ -9418,6 +9598,8 @@
                   <a:srgbClr val="222733"/>
                 </a:solidFill>
                 <a:latin typeface="맑은 고딕"/>
+                <a:ea typeface="맑은 고딕"/>
+                <a:cs typeface="맑은 고딕"/>
               </a:rPr>
               <a:t>    environment: ["JAVA_OPTS=-Xmx512m"]</a:t>
             </a:r>
@@ -9434,6 +9616,8 @@
                   <a:srgbClr val="0D9488"/>
                 </a:solidFill>
                 <a:latin typeface="맑은 고딕"/>
+                <a:ea typeface="맑은 고딕"/>
+                <a:cs typeface="맑은 고딕"/>
               </a:rPr>
               <a:t>●  </a:t>
             </a:r>
@@ -9443,6 +9627,8 @@
                   <a:srgbClr val="222733"/>
                 </a:solidFill>
                 <a:latin typeface="맑은 고딕"/>
+                <a:ea typeface="맑은 고딕"/>
+                <a:cs typeface="맑은 고딕"/>
               </a:rPr>
               <a:t>    volumes:</a:t>
             </a:r>
@@ -9459,6 +9645,8 @@
                   <a:srgbClr val="0D9488"/>
                 </a:solidFill>
                 <a:latin typeface="맑은 고딕"/>
+                <a:ea typeface="맑은 고딕"/>
+                <a:cs typeface="맑은 고딕"/>
               </a:rPr>
               <a:t>●  </a:t>
             </a:r>
@@ -9468,6 +9656,8 @@
                   <a:srgbClr val="222733"/>
                 </a:solidFill>
                 <a:latin typeface="맑은 고딕"/>
+                <a:ea typeface="맑은 고딕"/>
+                <a:cs typeface="맑은 고딕"/>
               </a:rPr>
               <a:t>      - jenkins_home:/var/jenkins_home</a:t>
             </a:r>
@@ -9484,6 +9674,8 @@
                   <a:srgbClr val="0D9488"/>
                 </a:solidFill>
                 <a:latin typeface="맑은 고딕"/>
+                <a:ea typeface="맑은 고딕"/>
+                <a:cs typeface="맑은 고딕"/>
               </a:rPr>
               <a:t>●  </a:t>
             </a:r>
@@ -9493,6 +9685,8 @@
                   <a:srgbClr val="222733"/>
                 </a:solidFill>
                 <a:latin typeface="맑은 고딕"/>
+                <a:ea typeface="맑은 고딕"/>
+                <a:cs typeface="맑은 고딕"/>
               </a:rPr>
               <a:t>      - /var/run/docker.sock:/var/run/docker.sock</a:t>
             </a:r>
@@ -9528,6 +9722,8 @@
                   <a:srgbClr val="5B6373"/>
                 </a:solidFill>
                 <a:latin typeface="맑은 고딕"/>
+                <a:ea typeface="맑은 고딕"/>
+                <a:cs typeface="맑은 고딕"/>
               </a:rPr>
               <a:t>클라우드인프라관리  ·  11주차 2차시</a:t>
             </a:r>
@@ -9563,6 +9759,8 @@
                   <a:srgbClr val="5B6373"/>
                 </a:solidFill>
                 <a:latin typeface="맑은 고딕"/>
+                <a:ea typeface="맑은 고딕"/>
+                <a:cs typeface="맑은 고딕"/>
               </a:rPr>
               <a:t>07 / 13</a:t>
             </a:r>
@@ -9766,6 +9964,8 @@
                   <a:srgbClr val="14213D"/>
                 </a:solidFill>
                 <a:latin typeface="맑은 고딕"/>
+                <a:ea typeface="맑은 고딕"/>
+                <a:cs typeface="맑은 고딕"/>
               </a:rPr>
               <a:t>02</a:t>
             </a:r>
@@ -9801,6 +10001,8 @@
                   <a:srgbClr val="14B8A6"/>
                 </a:solidFill>
                 <a:latin typeface="맑은 고딕"/>
+                <a:ea typeface="맑은 고딕"/>
+                <a:cs typeface="맑은 고딕"/>
               </a:rPr>
               <a:t>PART 2 · Compose 설정</a:t>
             </a:r>
@@ -9836,6 +10038,8 @@
                   <a:srgbClr val="FFFFFF"/>
                 </a:solidFill>
                 <a:latin typeface="맑은 고딕"/>
+                <a:ea typeface="맑은 고딕"/>
+                <a:cs typeface="맑은 고딕"/>
               </a:rPr>
               <a:t>docker.sock을 마운트하는 이유</a:t>
             </a:r>
@@ -9875,6 +10079,8 @@
                   <a:srgbClr val="0D9488"/>
                 </a:solidFill>
                 <a:latin typeface="맑은 고딕"/>
+                <a:ea typeface="맑은 고딕"/>
+                <a:cs typeface="맑은 고딕"/>
               </a:rPr>
               <a:t>●  </a:t>
             </a:r>
@@ -9884,6 +10090,8 @@
                   <a:srgbClr val="222733"/>
                 </a:solidFill>
                 <a:latin typeface="맑은 고딕"/>
+                <a:ea typeface="맑은 고딕"/>
+                <a:cs typeface="맑은 고딕"/>
               </a:rPr>
               <a:t>/var/run/docker.sock = 호스트 Docker 데몬과 통신하는 창구(소켓 파일)</a:t>
             </a:r>
@@ -9900,6 +10108,8 @@
                   <a:srgbClr val="0D9488"/>
                 </a:solidFill>
                 <a:latin typeface="맑은 고딕"/>
+                <a:ea typeface="맑은 고딕"/>
+                <a:cs typeface="맑은 고딕"/>
               </a:rPr>
               <a:t>●  </a:t>
             </a:r>
@@ -9909,6 +10119,8 @@
                   <a:srgbClr val="222733"/>
                 </a:solidFill>
                 <a:latin typeface="맑은 고딕"/>
+                <a:ea typeface="맑은 고딕"/>
+                <a:cs typeface="맑은 고딕"/>
               </a:rPr>
               <a:t>이걸 Jenkins 컨테이너 안에 그대로 마운트하면, Jenkins가 컨테이너 안에서도 호스트의 Docker를 직접 제어할 수 있음</a:t>
             </a:r>
@@ -9925,6 +10137,8 @@
                   <a:srgbClr val="0D9488"/>
                 </a:solidFill>
                 <a:latin typeface="맑은 고딕"/>
+                <a:ea typeface="맑은 고딕"/>
+                <a:cs typeface="맑은 고딕"/>
               </a:rPr>
               <a:t>●  </a:t>
             </a:r>
@@ -9934,6 +10148,8 @@
                   <a:srgbClr val="222733"/>
                 </a:solidFill>
                 <a:latin typeface="맑은 고딕"/>
+                <a:ea typeface="맑은 고딕"/>
+                <a:cs typeface="맑은 고딕"/>
               </a:rPr>
               <a:t>13주차에 Jenkins가 docker build·push를 실행할 때 바로 이 구조를 사용</a:t>
             </a:r>
@@ -9969,6 +10185,8 @@
                   <a:srgbClr val="14213D"/>
                 </a:solidFill>
                 <a:latin typeface="맑은 고딕"/>
+                <a:ea typeface="맑은 고딕"/>
+                <a:cs typeface="맑은 고딕"/>
               </a:rPr>
               <a:t>docker.sock 마운트 구조</a:t>
             </a:r>
@@ -10048,6 +10266,8 @@
                   <a:srgbClr val="FFFFFF"/>
                 </a:solidFill>
                 <a:latin typeface="맑은 고딕"/>
+                <a:ea typeface="맑은 고딕"/>
+                <a:cs typeface="맑은 고딕"/>
               </a:rPr>
               <a:t>Jenkins 컨테이너</a:t>
             </a:r>
@@ -10127,6 +10347,8 @@
                   <a:srgbClr val="FFFFFF"/>
                 </a:solidFill>
                 <a:latin typeface="맑은 고딕"/>
+                <a:ea typeface="맑은 고딕"/>
+                <a:cs typeface="맑은 고딕"/>
               </a:rPr>
               <a:t>↕ /var/run/docker.sock</a:t>
             </a:r>
@@ -10206,6 +10428,8 @@
                   <a:srgbClr val="FFFFFF"/>
                 </a:solidFill>
                 <a:latin typeface="맑은 고딕"/>
+                <a:ea typeface="맑은 고딕"/>
+                <a:cs typeface="맑은 고딕"/>
               </a:rPr>
               <a:t>호스트(VM)의 Docker 데몬</a:t>
             </a:r>
@@ -10241,6 +10465,8 @@
                   <a:srgbClr val="5B6373"/>
                 </a:solidFill>
                 <a:latin typeface="맑은 고딕"/>
+                <a:ea typeface="맑은 고딕"/>
+                <a:cs typeface="맑은 고딕"/>
               </a:rPr>
               <a:t>클라우드인프라관리  ·  11주차 2차시</a:t>
             </a:r>
@@ -10276,6 +10502,8 @@
                   <a:srgbClr val="5B6373"/>
                 </a:solidFill>
                 <a:latin typeface="맑은 고딕"/>
+                <a:ea typeface="맑은 고딕"/>
+                <a:cs typeface="맑은 고딕"/>
               </a:rPr>
               <a:t>08 / 13</a:t>
             </a:r>
@@ -10479,6 +10707,8 @@
                   <a:srgbClr val="14213D"/>
                 </a:solidFill>
                 <a:latin typeface="맑은 고딕"/>
+                <a:ea typeface="맑은 고딕"/>
+                <a:cs typeface="맑은 고딕"/>
               </a:rPr>
               <a:t>02</a:t>
             </a:r>
@@ -10514,6 +10744,8 @@
                   <a:srgbClr val="14B8A6"/>
                 </a:solidFill>
                 <a:latin typeface="맑은 고딕"/>
+                <a:ea typeface="맑은 고딕"/>
+                <a:cs typeface="맑은 고딕"/>
               </a:rPr>
               <a:t>PART 2 · Compose 설정</a:t>
             </a:r>
@@ -10549,6 +10781,8 @@
                   <a:srgbClr val="FFFFFF"/>
                 </a:solidFill>
                 <a:latin typeface="맑은 고딕"/>
+                <a:ea typeface="맑은 고딕"/>
+                <a:cs typeface="맑은 고딕"/>
               </a:rPr>
               <a:t>JAVA_OPTS로 메모리 제한</a:t>
             </a:r>
@@ -10588,6 +10822,8 @@
                   <a:srgbClr val="0D9488"/>
                 </a:solidFill>
                 <a:latin typeface="맑은 고딕"/>
+                <a:ea typeface="맑은 고딕"/>
+                <a:cs typeface="맑은 고딕"/>
               </a:rPr>
               <a:t>●  </a:t>
             </a:r>
@@ -10597,6 +10833,8 @@
                   <a:srgbClr val="222733"/>
                 </a:solidFill>
                 <a:latin typeface="맑은 고딕"/>
+                <a:ea typeface="맑은 고딕"/>
+                <a:cs typeface="맑은 고딕"/>
               </a:rPr>
               <a:t>JAVA_OPTS=-Xmx512m — Jenkins(자바 기반)의 힙 메모리를 512MB로 제한</a:t>
             </a:r>
@@ -10613,6 +10851,8 @@
                   <a:srgbClr val="0D9488"/>
                 </a:solidFill>
                 <a:latin typeface="맑은 고딕"/>
+                <a:ea typeface="맑은 고딕"/>
+                <a:cs typeface="맑은 고딕"/>
               </a:rPr>
               <a:t>●  </a:t>
             </a:r>
@@ -10622,6 +10862,8 @@
                   <a:srgbClr val="222733"/>
                 </a:solidFill>
                 <a:latin typeface="맑은 고딕"/>
+                <a:ea typeface="맑은 고딕"/>
+                <a:cs typeface="맑은 고딕"/>
               </a:rPr>
               <a:t>이유: 13~14주차에 minikube와 Jenkins를 동시에 띄워도 4GB VM 안에서 안정적으로 동작하게 하기 위함</a:t>
             </a:r>
@@ -10638,6 +10880,8 @@
                   <a:srgbClr val="0D9488"/>
                 </a:solidFill>
                 <a:latin typeface="맑은 고딕"/>
+                <a:ea typeface="맑은 고딕"/>
+                <a:cs typeface="맑은 고딕"/>
               </a:rPr>
               <a:t>●  </a:t>
             </a:r>
@@ -10647,6 +10891,8 @@
                   <a:srgbClr val="222733"/>
                 </a:solidFill>
                 <a:latin typeface="맑은 고딕"/>
+                <a:ea typeface="맑은 고딕"/>
+                <a:cs typeface="맑은 고딕"/>
               </a:rPr>
               <a:t>14주차 부하테스트 직전에는 docker stop jenkins로 잠시 꺼두는 것도 방법</a:t>
             </a:r>
@@ -10682,6 +10928,8 @@
                   <a:srgbClr val="5B6373"/>
                 </a:solidFill>
                 <a:latin typeface="맑은 고딕"/>
+                <a:ea typeface="맑은 고딕"/>
+                <a:cs typeface="맑은 고딕"/>
               </a:rPr>
               <a:t>클라우드인프라관리  ·  11주차 2차시</a:t>
             </a:r>
@@ -10717,6 +10965,8 @@
                   <a:srgbClr val="5B6373"/>
                 </a:solidFill>
                 <a:latin typeface="맑은 고딕"/>
+                <a:ea typeface="맑은 고딕"/>
+                <a:cs typeface="맑은 고딕"/>
               </a:rPr>
               <a:t>09 / 13</a:t>
             </a:r>

--- a/class/cloud_infra_mgmt/11주차_Jenkins_CICD기초/01_강의자료/2차시_DockerCompose로Jenkins설치.pptx
+++ b/class/cloud_infra_mgmt/11주차_Jenkins_CICD기초/01_강의자료/2차시_DockerCompose로Jenkins설치.pptx
@@ -9689,6 +9689,60 @@
                 <a:cs typeface="맑은 고딕"/>
               </a:rPr>
               <a:t>      - /var/run/docker.sock:/var/run/docker.sock</a:t>
+            </a:r>
+          </a:p>
+          <a:p>
+            <a:pPr>
+              <a:lnSpc>
+                <a:spcPct val="149500"/>
+              </a:lnSpc>
+            </a:pPr>
+            <a:r>
+              <a:rPr sz="1700" b="1">
+                <a:solidFill>
+                  <a:srgbClr val="0D9488"/>
+                </a:solidFill>
+                <a:latin typeface="맑은 고딕"/>
+                <a:ea typeface="맑은 고딕"/>
+                <a:cs typeface="맑은 고딕"/>
+              </a:rPr>
+              <a:t>●</a:t>
+            </a:r>
+          </a:p>
+          <a:p>
+            <a:pPr>
+              <a:lnSpc>
+                <a:spcPct val="149500"/>
+              </a:lnSpc>
+            </a:pPr>
+            <a:r>
+              <a:rPr sz="1700" b="1">
+                <a:solidFill>
+                  <a:srgbClr val="0D9488"/>
+                </a:solidFill>
+                <a:latin typeface="맑은 고딕"/>
+                <a:ea typeface="맑은 고딕"/>
+                <a:cs typeface="맑은 고딕"/>
+              </a:rPr>
+              <a:t>●  volumes:</a:t>
+            </a:r>
+          </a:p>
+          <a:p>
+            <a:pPr>
+              <a:lnSpc>
+                <a:spcPct val="149500"/>
+              </a:lnSpc>
+            </a:pPr>
+            <a:r>
+              <a:rPr sz="1700" b="1">
+                <a:solidFill>
+                  <a:srgbClr val="0D9488"/>
+                </a:solidFill>
+                <a:latin typeface="맑은 고딕"/>
+                <a:ea typeface="맑은 고딕"/>
+                <a:cs typeface="맑은 고딕"/>
+              </a:rPr>
+              <a:t>●    jenkins_home:</a:t>
             </a:r>
           </a:p>
         </p:txBody>
